--- a/lecons/LSA/Biogeography/LSA_BIO_L02_Physical_Properties_of_the_Soil_Texture.pptx
+++ b/lecons/LSA/Biogeography/LSA_BIO_L02_Physical_Properties_of_the_Soil_Texture.pptx
@@ -6673,7 +6673,7 @@
                 <a:ea typeface="Times New Roman" pitchFamily="34" charset="-122"/>
                 <a:cs typeface="Times New Roman" pitchFamily="34" charset="-120"/>
               </a:rPr>
-              <a:t>Lesson 2: Physical Properties of the Soil: Texture</a:t>
+              <a:t>Lesson 2</a:t>
             </a:r>
             <a:endParaRPr lang="en-US" sz="2600" dirty="0"/>
           </a:p>
